--- a/leslie-linkedin/slides.pptx
+++ b/leslie-linkedin/slides.pptx
@@ -4376,9 +4376,9 @@
                 <a:tableStyleId>{5C22544A-7EE6-4342-B048-85BDC9FD1C3A}</a:tableStyleId>
               </a:tblPr>
               <a:tblGrid>
-                <a:gridCol w="731520"/>
-                <a:gridCol w="3794760"/>
-                <a:gridCol w="914400"/>
+                <a:gridCol w="640080"/>
+                <a:gridCol w="3657600"/>
+                <a:gridCol w="1143000"/>
               </a:tblGrid>
               <a:tr h="365760">
                 <a:tc>
@@ -4858,9 +4858,9 @@
                 <a:tableStyleId>{5C22544A-7EE6-4342-B048-85BDC9FD1C3A}</a:tableStyleId>
               </a:tblPr>
               <a:tblGrid>
-                <a:gridCol w="731520"/>
-                <a:gridCol w="3794760"/>
-                <a:gridCol w="914400"/>
+                <a:gridCol w="640080"/>
+                <a:gridCol w="3657600"/>
+                <a:gridCol w="1143000"/>
               </a:tblGrid>
               <a:tr h="365760">
                 <a:tc>
@@ -8580,30 +8580,6 @@
       </p:sp>
       <p:pic>
         <p:nvPicPr>
-          <p:cNvPr id="10" name="Picture 9" descr="c_france24.jpg"/>
-          <p:cNvPicPr>
-            <a:picLocks noChangeAspect="1"/>
-          </p:cNvPicPr>
-          <p:nvPr/>
-        </p:nvPicPr>
-        <p:blipFill>
-          <a:blip r:embed="rId3"/>
-          <a:stretch>
-            <a:fillRect/>
-          </a:stretch>
-        </p:blipFill>
-        <p:spPr>
-          <a:xfrm>
-            <a:off x="548640" y="1554480"/>
-            <a:ext cx="3657600" cy="2648902"/>
-          </a:xfrm>
-          <a:prstGeom prst="rect">
-            <a:avLst/>
-          </a:prstGeom>
-        </p:spPr>
-      </p:pic>
-      <p:pic>
-        <p:nvPicPr>
           <p:cNvPr id="11" name="Picture 10" descr="c_sounga.jpg"/>
           <p:cNvPicPr>
             <a:picLocks noChangeAspect="1"/>
@@ -9148,6 +9124,30 @@
           </a:p>
         </p:txBody>
       </p:sp>
+      <p:pic>
+        <p:nvPicPr>
+          <p:cNvPr id="24" name="Picture 23" descr="c_nairobi.jpg"/>
+          <p:cNvPicPr>
+            <a:picLocks noChangeAspect="1"/>
+          </p:cNvPicPr>
+          <p:nvPr/>
+        </p:nvPicPr>
+        <p:blipFill>
+          <a:blip r:embed="rId5"/>
+          <a:stretch>
+            <a:fillRect/>
+          </a:stretch>
+        </p:blipFill>
+        <p:spPr>
+          <a:xfrm>
+            <a:off x="548640" y="1554480"/>
+            <a:ext cx="3657600" cy="2651760"/>
+          </a:xfrm>
+          <a:prstGeom prst="rect">
+            <a:avLst/>
+          </a:prstGeom>
+        </p:spPr>
+      </p:pic>
     </p:spTree>
   </p:cSld>
   <p:clrMapOvr>
